--- a/asgnmnts/assgmnt 1/final/spec9997_assgnmnt_1_eamonn_kelly_D24127620.pptx
+++ b/asgnmnts/assgmnt 1/final/spec9997_assgnmnt_1_eamonn_kelly_D24127620.pptx
@@ -235,7 +235,7 @@
           <a:p>
             <a:fld id="{35CFF80E-FE01-479F-9FC2-075B3977819B}" type="datetimeFigureOut">
               <a:rPr lang="en-GB" smtClean="0"/>
-              <a:t>09/02/2026</a:t>
+              <a:t>06/03/2026</a:t>
             </a:fld>
             <a:endParaRPr lang="en-GB"/>
           </a:p>
@@ -1225,7 +1225,7 @@
           <a:p>
             <a:fld id="{149249F5-ABDC-F949-8525-04D1FEAB47D9}" type="datetimeFigureOut">
               <a:rPr lang="en-US" smtClean="0"/>
-              <a:t>2/8/2026</a:t>
+              <a:t>3/6/2026</a:t>
             </a:fld>
             <a:endParaRPr lang="en-US"/>
           </a:p>
@@ -1476,7 +1476,7 @@
           <a:p>
             <a:fld id="{149249F5-ABDC-F949-8525-04D1FEAB47D9}" type="datetimeFigureOut">
               <a:rPr lang="en-US" smtClean="0"/>
-              <a:t>2/8/2026</a:t>
+              <a:t>3/6/2026</a:t>
             </a:fld>
             <a:endParaRPr lang="en-US"/>
           </a:p>
@@ -1790,7 +1790,7 @@
           <a:p>
             <a:fld id="{149249F5-ABDC-F949-8525-04D1FEAB47D9}" type="datetimeFigureOut">
               <a:rPr lang="en-US" smtClean="0"/>
-              <a:t>2/8/2026</a:t>
+              <a:t>3/6/2026</a:t>
             </a:fld>
             <a:endParaRPr lang="en-US"/>
           </a:p>
@@ -2131,7 +2131,7 @@
           <a:p>
             <a:fld id="{149249F5-ABDC-F949-8525-04D1FEAB47D9}" type="datetimeFigureOut">
               <a:rPr lang="en-US" smtClean="0"/>
-              <a:t>2/8/2026</a:t>
+              <a:t>3/6/2026</a:t>
             </a:fld>
             <a:endParaRPr lang="en-US"/>
           </a:p>
@@ -2445,7 +2445,7 @@
           <a:p>
             <a:fld id="{149249F5-ABDC-F949-8525-04D1FEAB47D9}" type="datetimeFigureOut">
               <a:rPr lang="en-US" smtClean="0"/>
-              <a:t>2/8/2026</a:t>
+              <a:t>3/6/2026</a:t>
             </a:fld>
             <a:endParaRPr lang="en-US"/>
           </a:p>
@@ -2838,7 +2838,7 @@
           <a:p>
             <a:fld id="{149249F5-ABDC-F949-8525-04D1FEAB47D9}" type="datetimeFigureOut">
               <a:rPr lang="en-US" smtClean="0"/>
-              <a:t>2/8/2026</a:t>
+              <a:t>3/6/2026</a:t>
             </a:fld>
             <a:endParaRPr lang="en-US"/>
           </a:p>
@@ -3008,7 +3008,7 @@
           <a:p>
             <a:fld id="{149249F5-ABDC-F949-8525-04D1FEAB47D9}" type="datetimeFigureOut">
               <a:rPr lang="en-US" smtClean="0"/>
-              <a:t>2/8/2026</a:t>
+              <a:t>3/6/2026</a:t>
             </a:fld>
             <a:endParaRPr lang="en-US"/>
           </a:p>
@@ -3188,7 +3188,7 @@
           <a:p>
             <a:fld id="{149249F5-ABDC-F949-8525-04D1FEAB47D9}" type="datetimeFigureOut">
               <a:rPr lang="en-US" smtClean="0"/>
-              <a:t>2/8/2026</a:t>
+              <a:t>3/6/2026</a:t>
             </a:fld>
             <a:endParaRPr lang="en-US"/>
           </a:p>
@@ -3364,7 +3364,7 @@
           <a:p>
             <a:fld id="{149249F5-ABDC-F949-8525-04D1FEAB47D9}" type="datetimeFigureOut">
               <a:rPr lang="en-US" smtClean="0"/>
-              <a:t>2/8/2026</a:t>
+              <a:t>3/6/2026</a:t>
             </a:fld>
             <a:endParaRPr lang="en-US"/>
           </a:p>
@@ -3611,7 +3611,7 @@
           <a:p>
             <a:fld id="{149249F5-ABDC-F949-8525-04D1FEAB47D9}" type="datetimeFigureOut">
               <a:rPr lang="en-US" smtClean="0"/>
-              <a:t>2/8/2026</a:t>
+              <a:t>3/6/2026</a:t>
             </a:fld>
             <a:endParaRPr lang="en-US"/>
           </a:p>
@@ -3843,7 +3843,7 @@
           <a:p>
             <a:fld id="{149249F5-ABDC-F949-8525-04D1FEAB47D9}" type="datetimeFigureOut">
               <a:rPr lang="en-US" smtClean="0"/>
-              <a:t>2/8/2026</a:t>
+              <a:t>3/6/2026</a:t>
             </a:fld>
             <a:endParaRPr lang="en-US"/>
           </a:p>
@@ -4217,7 +4217,7 @@
           <a:p>
             <a:fld id="{149249F5-ABDC-F949-8525-04D1FEAB47D9}" type="datetimeFigureOut">
               <a:rPr lang="en-US" smtClean="0"/>
-              <a:t>2/8/2026</a:t>
+              <a:t>3/6/2026</a:t>
             </a:fld>
             <a:endParaRPr lang="en-US"/>
           </a:p>
@@ -4340,7 +4340,7 @@
           <a:p>
             <a:fld id="{149249F5-ABDC-F949-8525-04D1FEAB47D9}" type="datetimeFigureOut">
               <a:rPr lang="en-US" smtClean="0"/>
-              <a:t>2/8/2026</a:t>
+              <a:t>3/6/2026</a:t>
             </a:fld>
             <a:endParaRPr lang="en-US"/>
           </a:p>
@@ -4435,7 +4435,7 @@
           <a:p>
             <a:fld id="{149249F5-ABDC-F949-8525-04D1FEAB47D9}" type="datetimeFigureOut">
               <a:rPr lang="en-US" smtClean="0"/>
-              <a:t>2/8/2026</a:t>
+              <a:t>3/6/2026</a:t>
             </a:fld>
             <a:endParaRPr lang="en-US"/>
           </a:p>
@@ -4690,7 +4690,7 @@
           <a:p>
             <a:fld id="{149249F5-ABDC-F949-8525-04D1FEAB47D9}" type="datetimeFigureOut">
               <a:rPr lang="en-US" smtClean="0"/>
-              <a:t>2/8/2026</a:t>
+              <a:t>3/6/2026</a:t>
             </a:fld>
             <a:endParaRPr lang="en-US"/>
           </a:p>
@@ -4953,7 +4953,7 @@
           <a:p>
             <a:fld id="{149249F5-ABDC-F949-8525-04D1FEAB47D9}" type="datetimeFigureOut">
               <a:rPr lang="en-US" smtClean="0"/>
-              <a:t>2/8/2026</a:t>
+              <a:t>3/6/2026</a:t>
             </a:fld>
             <a:endParaRPr lang="en-US"/>
           </a:p>
@@ -5696,7 +5696,7 @@
           <a:p>
             <a:fld id="{149249F5-ABDC-F949-8525-04D1FEAB47D9}" type="datetimeFigureOut">
               <a:rPr lang="en-US" smtClean="0"/>
-              <a:t>2/8/2026</a:t>
+              <a:t>3/6/2026</a:t>
             </a:fld>
             <a:endParaRPr lang="en-US"/>
           </a:p>
@@ -6320,22 +6320,13 @@
               </a:rPr>
             </a:br>
             <a:r>
-              <a:rPr lang="en-US" dirty="0" err="1">
-                <a:solidFill>
-                  <a:srgbClr val="FFFFFF"/>
-                </a:solidFill>
-                <a:cs typeface="Calibri Light"/>
-              </a:rPr>
-              <a:t>Assigment</a:t>
-            </a:r>
-            <a:r>
               <a:rPr lang="en-US" dirty="0">
                 <a:solidFill>
                   <a:srgbClr val="FFFFFF"/>
                 </a:solidFill>
                 <a:cs typeface="Calibri Light"/>
               </a:rPr>
-              <a:t> 1</a:t>
+              <a:t>Assignment 1</a:t>
             </a:r>
             <a:br>
               <a:rPr lang="en-US" dirty="0">
@@ -6569,15 +6560,7 @@
             <a:pPr lvl="1"/>
             <a:r>
               <a:rPr lang="en-GB" dirty="0"/>
-              <a:t>Experiment  - no causal or control groups, no </a:t>
-            </a:r>
-            <a:r>
-              <a:rPr lang="en-GB" dirty="0" err="1"/>
-              <a:t>specualated</a:t>
-            </a:r>
-            <a:r>
-              <a:rPr lang="en-GB" dirty="0"/>
-              <a:t> measurable effect</a:t>
+              <a:t>Experiment  - no causal or control groups, no speculated measurable effect</a:t>
             </a:r>
           </a:p>
           <a:p>
@@ -6605,23 +6588,7 @@
             <a:pPr lvl="1"/>
             <a:r>
               <a:rPr lang="en-GB" dirty="0"/>
-              <a:t>grounded theory – does </a:t>
-            </a:r>
-            <a:r>
-              <a:rPr lang="en-GB" dirty="0" err="1"/>
-              <a:t>tno</a:t>
-            </a:r>
-            <a:r>
-              <a:rPr lang="en-GB" dirty="0"/>
-              <a:t> use </a:t>
-            </a:r>
-            <a:r>
-              <a:rPr lang="en-GB" dirty="0" err="1"/>
-              <a:t>indeuctive</a:t>
-            </a:r>
-            <a:r>
-              <a:rPr lang="en-GB" dirty="0"/>
-              <a:t> methods to predict or explain</a:t>
+              <a:t>grounded theory – does not use inductive methods to predict or explain</a:t>
             </a:r>
           </a:p>
           <a:p>
@@ -6740,12 +6707,8 @@
               <a:t>Is not </a:t>
             </a:r>
             <a:r>
-              <a:rPr lang="en-GB" b="1" dirty="0" err="1"/>
-              <a:t>Qaulitative</a:t>
-            </a:r>
-            <a:r>
               <a:rPr lang="en-GB" b="1" dirty="0"/>
-              <a:t> </a:t>
+              <a:t>Qualitative </a:t>
             </a:r>
           </a:p>
           <a:p>
@@ -7078,7 +7041,7 @@
             <a:pPr lvl="2"/>
             <a:r>
               <a:rPr lang="en-GB" dirty="0"/>
-              <a:t>Tools / Models = Neural Networks</a:t>
+              <a:t>Tools / Models = k-means clustering (k centroids, k=6), Neural Networks</a:t>
             </a:r>
           </a:p>
           <a:p>
@@ -7379,22 +7342,14 @@
             <a:pPr lvl="3"/>
             <a:r>
               <a:rPr lang="en-GB" dirty="0"/>
-              <a:t>Included some financials &gt; test for company size (</a:t>
-            </a:r>
-            <a:r>
-              <a:rPr lang="en-GB" dirty="0" err="1"/>
-              <a:t>mrkt</a:t>
-            </a:r>
+              <a:t>Included some financials &gt; test for company size (market cap influence on ESG)</a:t>
+            </a:r>
+          </a:p>
+          <a:p>
+            <a:pPr lvl="3"/>
             <a:r>
               <a:rPr lang="en-GB" dirty="0"/>
-              <a:t> cap influence on ESG)</a:t>
-            </a:r>
-          </a:p>
-          <a:p>
-            <a:pPr lvl="3"/>
-            <a:r>
-              <a:rPr lang="en-GB" dirty="0"/>
-              <a:t>NOTE &gt; Refinitiv no linger exists was bought and no private company &gt; </a:t>
+              <a:t>NOTE &gt; Refinitiv no longer exists was bought and no private company &gt; </a:t>
             </a:r>
             <a:r>
               <a:rPr lang="en-GB" dirty="0">
@@ -7483,15 +7438,7 @@
             <a:pPr lvl="2"/>
             <a:r>
               <a:rPr lang="en-GB" dirty="0"/>
-              <a:t>Performed a keyword search to include the 10 primary themes within the three ESG dimensions and company names (variations) </a:t>
-            </a:r>
-            <a:r>
-              <a:rPr lang="en-GB" dirty="0" err="1"/>
-              <a:t>Ieach</a:t>
-            </a:r>
-            <a:r>
-              <a:rPr lang="en-GB" dirty="0"/>
-              <a:t> company name to appear twice to ensure focussed content and exclude incidental mentions</a:t>
+              <a:t>Performed a keyword search to include the 10 primary themes within the three ESG dimensions and company names (variations) each company name to appear twice to ensure focussed content and exclude incidental mentions</a:t>
             </a:r>
           </a:p>
         </p:txBody>
@@ -8466,7 +8413,7 @@
         <p:spPr>
           <a:xfrm>
             <a:off x="478772" y="4126700"/>
-            <a:ext cx="11062741" cy="2308324"/>
+            <a:ext cx="11062741" cy="2585323"/>
           </a:xfrm>
           <a:prstGeom prst="rect">
             <a:avLst/>
@@ -8484,16 +8431,12 @@
               <a:buChar char="•"/>
             </a:pPr>
             <a:r>
+              <a:rPr lang="en-GB" dirty="0"/>
+              <a:t>R</a:t>
+            </a:r>
+            <a:r>
               <a:rPr lang="en-GB" b="0" i="0" u="none" strike="noStrike" baseline="0" dirty="0"/>
-              <a:t>We removed articles shorter than 200 characters and </a:t>
-            </a:r>
-            <a:r>
-              <a:rPr lang="en-GB" b="0" i="0" u="none" strike="noStrike" baseline="0" dirty="0" err="1"/>
-              <a:t>thos</a:t>
-            </a:r>
-            <a:r>
-              <a:rPr lang="en-GB" b="0" i="0" u="none" strike="noStrike" baseline="0" dirty="0"/>
-              <a:t> with HTML errors, then extracted text content using the Beautiful Soup library3#</a:t>
+              <a:t>emoved articles shorter than 200 characters and those with HTML errors, then extracted text content using the Beautiful Soup library3#</a:t>
             </a:r>
           </a:p>
           <a:p>
@@ -8537,7 +8480,7 @@
             </a:pPr>
             <a:r>
               <a:rPr lang="en-GB" dirty="0"/>
-              <a:t>72% were US sourced</a:t>
+              <a:t>72% of articles were US sourced</a:t>
             </a:r>
           </a:p>
         </p:txBody>
@@ -8649,7 +8592,7 @@
           <a:p>
             <a:r>
               <a:rPr lang="en-GB" dirty="0"/>
-              <a:t>100 articles randomly selected from the GDELT data  in step 1, served as training, validation and testing base for classifier.</a:t>
+              <a:t>100 companies randomly selected from the GDELT article dataset served as training, validation and testing base for classifier.</a:t>
             </a:r>
           </a:p>
           <a:p>
@@ -8688,7 +8631,7 @@
           <a:p>
             <a:r>
               <a:rPr lang="en-GB" dirty="0"/>
-              <a:t>Pairwise cosine similarity with &gt; 0.1  labelled as relevant</a:t>
+              <a:t>Pairwise cosine similarity with &gt; 0.1  labelled as ‘relevant’, else = ‘noise’</a:t>
             </a:r>
           </a:p>
         </p:txBody>
@@ -8776,7 +8719,7 @@
         <p:spPr/>
         <p:txBody>
           <a:bodyPr>
-            <a:normAutofit/>
+            <a:normAutofit fontScale="85000" lnSpcReduction="20000"/>
           </a:bodyPr>
           <a:lstStyle/>
           <a:p>
@@ -8802,6 +8745,27 @@
             </a:r>
           </a:p>
           <a:p>
+            <a:pPr lvl="1"/>
+            <a:r>
+              <a:rPr lang="en-GB" dirty="0"/>
+              <a:t>10,500 = training set</a:t>
+            </a:r>
+          </a:p>
+          <a:p>
+            <a:pPr lvl="1"/>
+            <a:r>
+              <a:rPr lang="en-GB" dirty="0"/>
+              <a:t>2,100 = validation</a:t>
+            </a:r>
+          </a:p>
+          <a:p>
+            <a:pPr lvl="1"/>
+            <a:r>
+              <a:rPr lang="en-GB" dirty="0"/>
+              <a:t>57,088 = testing</a:t>
+            </a:r>
+          </a:p>
+          <a:p>
             <a:r>
               <a:rPr lang="en-GB" dirty="0"/>
               <a:t>Articles are tokenized with the </a:t>
@@ -8863,6 +8827,12 @@
             <a:r>
               <a:rPr lang="en-GB" dirty="0"/>
               <a:t>Using the trained classifier, we then predict the relevance label for each article</a:t>
+            </a:r>
+          </a:p>
+          <a:p>
+            <a:r>
+              <a:rPr lang="en-GB" dirty="0"/>
+              <a:t>Had 83% accuracy and labelled all 3.7 million articles either ‘relevant  or ’noise”</a:t>
             </a:r>
           </a:p>
           <a:p>
@@ -9262,7 +9232,7 @@
             </a:r>
             <a:r>
               <a:rPr lang="en-GB" dirty="0"/>
-              <a:t> wit college account</a:t>
+              <a:t> with college account</a:t>
             </a:r>
           </a:p>
           <a:p>
@@ -9425,11 +9395,11 @@
             </a:r>
             <a:r>
               <a:rPr lang="en-GB" dirty="0" err="1"/>
-              <a:t>series,we</a:t>
+              <a:t>series,grouped</a:t>
             </a:r>
             <a:r>
               <a:rPr lang="en-GB" dirty="0"/>
-              <a:t> group articles by company and month and calculate a monthly sentiment ratio using the employ the </a:t>
+              <a:t> articles by company and month and calculate a monthly sentiment ratio using the employ the </a:t>
             </a:r>
             <a:r>
               <a:rPr lang="en-GB" b="1" dirty="0" err="1"/>
@@ -9594,13 +9564,24 @@
             </a:r>
             <a:r>
               <a:rPr lang="en-GB" sz="2400" b="1" dirty="0"/>
-              <a:t> </a:t>
-            </a:r>
-          </a:p>
-          <a:p>
+              <a:t>  &gt;</a:t>
+            </a:r>
             <a:r>
               <a:rPr lang="en-GB" sz="2400" dirty="0"/>
-              <a:t>groups articles by content, enabling us to track the evolution of key ESG-related topics discussed in the news over time</a:t>
+              <a:t>These embeddings serve as input for the k-means clustering algorithm</a:t>
+            </a:r>
+            <a:endParaRPr lang="en-GB" sz="2400" b="1" dirty="0"/>
+          </a:p>
+          <a:p>
+            <a:r>
+              <a:rPr lang="en-GB" sz="2400" dirty="0"/>
+              <a:t>Cluster the articles by content, using k-means </a:t>
+            </a:r>
+          </a:p>
+          <a:p>
+            <a:r>
+              <a:rPr lang="en-GB" sz="2400" dirty="0"/>
+              <a:t>enabling us to track the evolution of key ESG-related topics discussed in the news over time</a:t>
             </a:r>
           </a:p>
           <a:p>
@@ -9614,7 +9595,7 @@
             </a:r>
             <a:r>
               <a:rPr lang="en-GB" sz="2400" dirty="0"/>
-              <a:t> model for the task of ESG classification to create task-specific embeddings for the articles. These embeddings serve as input for the k-means clustering algorithm</a:t>
+              <a:t> model for the task of ESG classification to create task-specific embeddings for the articles. </a:t>
             </a:r>
           </a:p>
         </p:txBody>
@@ -9808,7 +9789,9 @@
         </p:nvSpPr>
         <p:spPr/>
         <p:txBody>
-          <a:bodyPr/>
+          <a:bodyPr>
+            <a:normAutofit/>
+          </a:bodyPr>
           <a:lstStyle/>
           <a:p>
             <a:r>
@@ -9828,6 +9811,40 @@
             <a:r>
               <a:rPr lang="en-GB" dirty="0"/>
               <a:t>Creating multiple time series features for each firm</a:t>
+            </a:r>
+          </a:p>
+          <a:p>
+            <a:r>
+              <a:rPr lang="en-GB" dirty="0"/>
+              <a:t>Combined </a:t>
+            </a:r>
+          </a:p>
+          <a:p>
+            <a:pPr lvl="1"/>
+            <a:r>
+              <a:rPr lang="en-GB" dirty="0"/>
+              <a:t>1 relevance time series</a:t>
+            </a:r>
+          </a:p>
+          <a:p>
+            <a:pPr lvl="1"/>
+            <a:r>
+              <a:rPr lang="en-GB" dirty="0"/>
+              <a:t>2 sentiment time series (positive or negative)</a:t>
+            </a:r>
+          </a:p>
+          <a:p>
+            <a:pPr lvl="1"/>
+            <a:r>
+              <a:rPr lang="en-GB" dirty="0"/>
+              <a:t>6 semantic time series from k-means clustering</a:t>
+            </a:r>
+          </a:p>
+          <a:p>
+            <a:pPr lvl="1"/>
+            <a:r>
+              <a:rPr lang="en-GB" dirty="0"/>
+              <a:t>= 9x12 matrix</a:t>
             </a:r>
           </a:p>
           <a:p>
@@ -10004,15 +10021,7 @@
             <a:pPr lvl="3"/>
             <a:r>
               <a:rPr lang="en-GB" sz="1400" dirty="0"/>
-              <a:t>A </a:t>
-            </a:r>
-            <a:r>
-              <a:rPr lang="en-GB" sz="1400" dirty="0" err="1"/>
-              <a:t>comvolution</a:t>
-            </a:r>
-            <a:r>
-              <a:rPr lang="en-GB" sz="1400" dirty="0"/>
-              <a:t> layer / batch normalization layer / a </a:t>
+              <a:t>A convolution layer / batch normalization layer / a </a:t>
             </a:r>
             <a:r>
               <a:rPr lang="en-GB" sz="1400" dirty="0" err="1"/>
@@ -10066,7 +10075,7 @@
           <a:p>
             <a:r>
               <a:rPr lang="en-GB" dirty="0"/>
-              <a:t>Regression and classification configurations used</a:t>
+              <a:t>Regression and Classification configurations used</a:t>
             </a:r>
           </a:p>
           <a:p>
@@ -10626,7 +10635,7 @@
             <p:ph idx="1"/>
             <p:extLst>
               <p:ext uri="{D42A27DB-BD31-4B8C-83A1-F6EECF244321}">
-                <p14:modId xmlns:p14="http://schemas.microsoft.com/office/powerpoint/2010/main" val="3851918754"/>
+                <p14:modId xmlns:p14="http://schemas.microsoft.com/office/powerpoint/2010/main" val="2225994779"/>
               </p:ext>
             </p:extLst>
           </p:nvPr>
@@ -10661,14 +10670,14 @@
                     </a:ext>
                   </a:extLst>
                 </a:gridCol>
-                <a:gridCol w="1552594">
+                <a:gridCol w="1455207">
                   <a:extLst>
                     <a:ext uri="{9D8B030D-6E8A-4147-A177-3AD203B41FA5}">
                       <a16:colId xmlns:a16="http://schemas.microsoft.com/office/drawing/2014/main" val="2068468105"/>
                     </a:ext>
                   </a:extLst>
                 </a:gridCol>
-                <a:gridCol w="964258">
+                <a:gridCol w="1061645">
                   <a:extLst>
                     <a:ext uri="{9D8B030D-6E8A-4147-A177-3AD203B41FA5}">
                       <a16:colId xmlns:a16="http://schemas.microsoft.com/office/drawing/2014/main" val="3074123442"/>
@@ -10746,14 +10755,14 @@
                         <a:buNone/>
                       </a:pPr>
                       <a:r>
-                        <a:rPr lang="en-GB" sz="1800" b="0" i="0" u="none" strike="noStrike">
+                        <a:rPr lang="en-GB" sz="1800" b="0" i="0" u="none" strike="noStrike" dirty="0">
                           <a:solidFill>
                             <a:srgbClr val="FFFFFF"/>
                           </a:solidFill>
                           <a:effectLst/>
                           <a:latin typeface="Calibri" panose="020F0502020204030204" pitchFamily="34" charset="0"/>
                         </a:rPr>
-                        <a:t>Overall results</a:t>
+                        <a:t>Overall results - classification</a:t>
                       </a:r>
                     </a:p>
                   </a:txBody>
@@ -10800,14 +10809,14 @@
                         <a:buNone/>
                       </a:pPr>
                       <a:r>
-                        <a:rPr lang="en-GB" sz="1800" b="0" i="0" u="none" strike="noStrike">
+                        <a:rPr lang="en-GB" sz="1800" b="0" i="0" u="none" strike="noStrike" dirty="0">
                           <a:solidFill>
                             <a:srgbClr val="FFFFFF"/>
                           </a:solidFill>
                           <a:effectLst/>
                           <a:latin typeface="Calibri" panose="020F0502020204030204" pitchFamily="34" charset="0"/>
                         </a:rPr>
-                        <a:t> </a:t>
+                        <a:t> Regression</a:t>
                       </a:r>
                     </a:p>
                   </a:txBody>
@@ -10844,14 +10853,14 @@
                         <a:buNone/>
                       </a:pPr>
                       <a:r>
-                        <a:rPr lang="en-GB" sz="1800" b="0" i="0" u="none" strike="noStrike">
+                        <a:rPr lang="en-GB" sz="1800" b="0" i="0" u="none" strike="noStrike" dirty="0">
                           <a:solidFill>
                             <a:srgbClr val="FFFFFF"/>
                           </a:solidFill>
                           <a:effectLst/>
                           <a:latin typeface="Calibri" panose="020F0502020204030204" pitchFamily="34" charset="0"/>
                         </a:rPr>
-                        <a:t> </a:t>
+                        <a:t>Regression</a:t>
                       </a:r>
                     </a:p>
                   </a:txBody>
@@ -10888,7 +10897,7 @@
                         <a:buNone/>
                       </a:pPr>
                       <a:r>
-                        <a:rPr lang="en-GB" sz="1800" b="0" i="0" u="none" strike="noStrike">
+                        <a:rPr lang="en-GB" sz="1800" b="0" i="0" u="none" strike="noStrike" dirty="0">
                           <a:solidFill>
                             <a:srgbClr val="FFFFFF"/>
                           </a:solidFill>
@@ -11664,7 +11673,7 @@
                         <a:buNone/>
                       </a:pPr>
                       <a:r>
-                        <a:rPr lang="en-GB" sz="1800" b="0" i="0" u="none" strike="noStrike">
+                        <a:rPr lang="en-GB" sz="1800" b="0" i="0" u="none" strike="noStrike" dirty="0">
                           <a:solidFill>
                             <a:srgbClr val="000000"/>
                           </a:solidFill>
@@ -11911,7 +11920,7 @@
                         <a:buNone/>
                       </a:pPr>
                       <a:r>
-                        <a:rPr lang="en-GB" sz="1800" b="0" i="0" u="none" strike="noStrike">
+                        <a:rPr lang="en-GB" sz="1800" b="0" i="0" u="none" strike="noStrike" dirty="0">
                           <a:solidFill>
                             <a:srgbClr val="000000"/>
                           </a:solidFill>
@@ -12151,7 +12160,7 @@
                         <a:buNone/>
                       </a:pPr>
                       <a:r>
-                        <a:rPr lang="en-GB" sz="1800" b="0" i="0" u="none" strike="noStrike">
+                        <a:rPr lang="en-GB" sz="1800" b="0" i="0" u="none" strike="noStrike" dirty="0">
                           <a:solidFill>
                             <a:srgbClr val="000000"/>
                           </a:solidFill>
@@ -12398,7 +12407,7 @@
                         <a:buNone/>
                       </a:pPr>
                       <a:r>
-                        <a:rPr lang="en-GB" sz="1800" b="0" i="0" u="none" strike="noStrike">
+                        <a:rPr lang="en-GB" sz="1800" b="0" i="0" u="none" strike="noStrike" dirty="0">
                           <a:solidFill>
                             <a:srgbClr val="000000"/>
                           </a:solidFill>
@@ -12638,7 +12647,7 @@
                         <a:buNone/>
                       </a:pPr>
                       <a:r>
-                        <a:rPr lang="en-GB" sz="1800" b="0" i="0" u="none" strike="noStrike">
+                        <a:rPr lang="en-GB" sz="1800" b="0" i="0" u="none" strike="noStrike" dirty="0">
                           <a:solidFill>
                             <a:srgbClr val="000000"/>
                           </a:solidFill>
@@ -12885,7 +12894,7 @@
                         <a:buNone/>
                       </a:pPr>
                       <a:r>
-                        <a:rPr lang="en-GB" sz="1800" b="0" i="0" u="none" strike="noStrike">
+                        <a:rPr lang="en-GB" sz="1800" b="0" i="0" u="none" strike="noStrike" dirty="0">
                           <a:solidFill>
                             <a:srgbClr val="000000"/>
                           </a:solidFill>
@@ -14831,7 +14840,7 @@
                         <a:buNone/>
                       </a:pPr>
                       <a:r>
-                        <a:rPr lang="en-GB" sz="1800" b="1" i="0" u="none" strike="noStrike" dirty="0">
+                        <a:rPr lang="en-GB" sz="1800" b="0" i="0" u="none" strike="noStrike" dirty="0">
                           <a:solidFill>
                             <a:srgbClr val="000000"/>
                           </a:solidFill>
@@ -14891,7 +14900,7 @@
                         <a:buNone/>
                       </a:pPr>
                       <a:r>
-                        <a:rPr lang="en-GB" sz="1800" b="0" i="0" u="none" strike="noStrike" dirty="0">
+                        <a:rPr lang="en-GB" sz="1800" b="1" i="0" u="none" strike="noStrike" dirty="0">
                           <a:solidFill>
                             <a:srgbClr val="000000"/>
                           </a:solidFill>
@@ -15258,7 +15267,7 @@
                         <a:buNone/>
                       </a:pPr>
                       <a:r>
-                        <a:rPr lang="en-GB" sz="1800" b="1" i="0" u="none" strike="noStrike" dirty="0">
+                        <a:rPr lang="en-GB" sz="1800" b="0" i="0" u="none" strike="noStrike" dirty="0">
                           <a:solidFill>
                             <a:srgbClr val="000000"/>
                           </a:solidFill>
@@ -16419,14 +16428,14 @@
                         <a:buNone/>
                       </a:pPr>
                       <a:r>
-                        <a:rPr lang="en-GB" sz="1800" b="0" i="0" u="none" strike="noStrike">
+                        <a:rPr lang="en-GB" sz="1800" b="0" i="0" u="none" strike="noStrike" dirty="0">
                           <a:solidFill>
                             <a:srgbClr val="FFFFFF"/>
                           </a:solidFill>
                           <a:effectLst/>
                           <a:latin typeface="Calibri" panose="020F0502020204030204" pitchFamily="34" charset="0"/>
                         </a:rPr>
-                        <a:t>Baseline Model</a:t>
+                        <a:t>Baseline Model – Predicting ESG scores</a:t>
                       </a:r>
                     </a:p>
                   </a:txBody>
@@ -16475,7 +16484,7 @@
                         <a:buNone/>
                       </a:pPr>
                       <a:r>
-                        <a:rPr lang="en-GB" sz="1800" b="1" i="0" u="none" strike="noStrike">
+                        <a:rPr lang="en-GB" sz="1800" b="1" i="0" u="none" strike="noStrike" dirty="0">
                           <a:solidFill>
                             <a:srgbClr val="000000"/>
                           </a:solidFill>
@@ -16571,7 +16580,7 @@
                         <a:buNone/>
                       </a:pPr>
                       <a:r>
-                        <a:rPr lang="en-GB" sz="1800" b="1" i="0" u="none" strike="noStrike">
+                        <a:rPr lang="en-GB" sz="1800" b="1" i="0" u="none" strike="noStrike" dirty="0">
                           <a:solidFill>
                             <a:srgbClr val="000000"/>
                           </a:solidFill>
@@ -16884,7 +16893,7 @@
                         <a:buNone/>
                       </a:pPr>
                       <a:r>
-                        <a:rPr lang="en-GB" sz="1800" b="0" i="0" u="none" strike="noStrike">
+                        <a:rPr lang="en-GB" sz="1800" b="0" i="0" u="none" strike="noStrike" dirty="0">
                           <a:solidFill>
                             <a:srgbClr val="000000"/>
                           </a:solidFill>
@@ -17004,7 +17013,7 @@
                         <a:buNone/>
                       </a:pPr>
                       <a:r>
-                        <a:rPr lang="en-GB" sz="1800" b="1" i="0" u="none" strike="noStrike" dirty="0">
+                        <a:rPr lang="en-GB" sz="1800" b="0" i="0" u="none" strike="noStrike" dirty="0">
                           <a:solidFill>
                             <a:srgbClr val="000000"/>
                           </a:solidFill>
@@ -17064,7 +17073,7 @@
                         <a:buNone/>
                       </a:pPr>
                       <a:r>
-                        <a:rPr lang="en-GB" sz="1800" b="0" i="0" u="none" strike="noStrike">
+                        <a:rPr lang="en-GB" sz="1800" b="0" i="0" u="none" strike="noStrike" dirty="0">
                           <a:solidFill>
                             <a:srgbClr val="000000"/>
                           </a:solidFill>
@@ -17124,7 +17133,7 @@
                         <a:buNone/>
                       </a:pPr>
                       <a:r>
-                        <a:rPr lang="en-GB" sz="1800" b="0" i="0" u="none" strike="noStrike">
+                        <a:rPr lang="en-GB" sz="1800" b="0" i="0" u="none" strike="noStrike" dirty="0">
                           <a:solidFill>
                             <a:srgbClr val="000000"/>
                           </a:solidFill>
@@ -17311,7 +17320,7 @@
                         <a:buNone/>
                       </a:pPr>
                       <a:r>
-                        <a:rPr lang="en-GB" sz="1800" b="0" i="0" u="none" strike="noStrike">
+                        <a:rPr lang="en-GB" sz="1800" b="0" i="0" u="none" strike="noStrike" dirty="0">
                           <a:solidFill>
                             <a:srgbClr val="000000"/>
                           </a:solidFill>
@@ -17611,7 +17620,7 @@
                         <a:buNone/>
                       </a:pPr>
                       <a:r>
-                        <a:rPr lang="en-GB" sz="1800" b="0" i="0" u="none" strike="noStrike">
+                        <a:rPr lang="en-GB" sz="1800" b="1" i="0" u="none" strike="noStrike" dirty="0">
                           <a:solidFill>
                             <a:srgbClr val="000000"/>
                           </a:solidFill>
@@ -18098,7 +18107,7 @@
                         <a:buNone/>
                       </a:pPr>
                       <a:r>
-                        <a:rPr lang="en-GB" sz="1800" b="0" i="0" u="none" strike="noStrike">
+                        <a:rPr lang="en-GB" sz="1800" b="1" i="0" u="none" strike="noStrike" dirty="0">
                           <a:solidFill>
                             <a:srgbClr val="000000"/>
                           </a:solidFill>
@@ -18803,19 +18812,19 @@
         </p:nvSpPr>
         <p:spPr>
           <a:xfrm>
-            <a:off x="3160295" y="363590"/>
-            <a:ext cx="7884696" cy="6052212"/>
+            <a:off x="3066585" y="402894"/>
+            <a:ext cx="7944952" cy="6198628"/>
           </a:xfrm>
         </p:spPr>
         <p:txBody>
           <a:bodyPr>
-            <a:normAutofit fontScale="77500" lnSpcReduction="20000"/>
+            <a:normAutofit fontScale="85000" lnSpcReduction="20000"/>
           </a:bodyPr>
           <a:lstStyle/>
           <a:p>
             <a:r>
               <a:rPr lang="en-GB" sz="2600" dirty="0"/>
-              <a:t>Using news articles from over 30,000 websites in approximately 200 countries, we have shown that ESG ratings can be predicted reliably based on information from news sources.</a:t>
+              <a:t>Using news articles from over 30,000 websites in approximately 200 countries, paper has shown that ESG ratings can be predicted reliably based on information from news sources.</a:t>
             </a:r>
           </a:p>
           <a:p>
@@ -18853,16 +18862,10 @@
           </a:p>
           <a:p>
             <a:pPr lvl="1"/>
-            <a:endParaRPr lang="en-GB" dirty="0"/>
-          </a:p>
-          <a:p>
-            <a:pPr lvl="1"/>
             <a:r>
               <a:rPr lang="en-GB" dirty="0"/>
               <a:t>these derived time series significantly enhance ESG prediction performance, underscoring their importance as key features.</a:t>
             </a:r>
-          </a:p>
-          <a:p>
             <a:endParaRPr lang="en-GB" sz="2000" dirty="0"/>
           </a:p>
           <a:p>
@@ -18895,7 +18898,7 @@
             <a:pPr lvl="1"/>
             <a:r>
               <a:rPr lang="en-GB" dirty="0"/>
-              <a:t>Additionally, we will consider bias detection techniques in news articles</a:t>
+              <a:t>Consider bias detection techniques in news articles</a:t>
             </a:r>
             <a:endParaRPr lang="en-US" sz="5400" dirty="0"/>
           </a:p>
@@ -19260,7 +19263,7 @@
         </p:blipFill>
         <p:spPr>
           <a:xfrm>
-            <a:off x="317118" y="914401"/>
+            <a:off x="335779" y="886409"/>
             <a:ext cx="11984254" cy="5456420"/>
           </a:xfrm>
           <a:prstGeom prst="rect">
@@ -19390,7 +19393,7 @@
           <a:p>
             <a:r>
               <a:rPr lang="en-GB" dirty="0"/>
-              <a:t>A lot of papers across databases sources from Chima</a:t>
+              <a:t>A lot of papers across databases sources from China</a:t>
             </a:r>
           </a:p>
           <a:p>
@@ -19496,13 +19499,13 @@
         </p:nvSpPr>
         <p:spPr>
           <a:xfrm>
-            <a:off x="240632" y="1118937"/>
+            <a:off x="274086" y="918410"/>
             <a:ext cx="10672010" cy="5739063"/>
           </a:xfrm>
         </p:spPr>
         <p:txBody>
           <a:bodyPr>
-            <a:normAutofit fontScale="85000" lnSpcReduction="20000"/>
+            <a:normAutofit fontScale="70000" lnSpcReduction="20000"/>
           </a:bodyPr>
           <a:lstStyle/>
           <a:p>
@@ -19775,7 +19778,50 @@
             </a:r>
             <a:r>
               <a:rPr lang="en-GB" dirty="0"/>
-              <a:t>(1), 82–94. https://doi.org/10.1109/TCSS.2017.2763128</a:t>
+              <a:t>(1), 82–94. </a:t>
+            </a:r>
+            <a:r>
+              <a:rPr lang="en-GB" dirty="0">
+                <a:hlinkClick r:id="rId2"/>
+              </a:rPr>
+              <a:t>https://doi.org/10.1109/TCSS.2017.2763128</a:t>
+            </a:r>
+            <a:endParaRPr lang="en-GB" dirty="0"/>
+          </a:p>
+          <a:p>
+            <a:r>
+              <a:rPr lang="en-GB" dirty="0"/>
+              <a:t>[20] Sokolov, A., Mostovoy, J., Ding, J. and Seco, L. [2021], ‘Building machine learning systems for automated ESG scoring’, The Journal of Impact and ESG Investing 1(3), 39–50.</a:t>
+            </a:r>
+          </a:p>
+          <a:p>
+            <a:r>
+              <a:rPr lang="en-GB" dirty="0"/>
+              <a:t>[21] Vaswani, A., </a:t>
+            </a:r>
+            <a:r>
+              <a:rPr lang="en-GB" dirty="0" err="1"/>
+              <a:t>Shazeer</a:t>
+            </a:r>
+            <a:r>
+              <a:rPr lang="en-GB" dirty="0"/>
+              <a:t>, N., Parmar, N., </a:t>
+            </a:r>
+            <a:r>
+              <a:rPr lang="en-GB" dirty="0" err="1"/>
+              <a:t>Uszkoreit</a:t>
+            </a:r>
+            <a:r>
+              <a:rPr lang="en-GB" dirty="0"/>
+              <a:t>, J., Jones, L., Gomez, A. N., Kaiser, Ł. and </a:t>
+            </a:r>
+            <a:r>
+              <a:rPr lang="en-GB" dirty="0" err="1"/>
+              <a:t>Polosukhin</a:t>
+            </a:r>
+            <a:r>
+              <a:rPr lang="en-GB" dirty="0"/>
+              <a:t>, I. [2017], ‘Attention is all you need’, Advances in neural information processing systems 30.</a:t>
             </a:r>
           </a:p>
           <a:p>
@@ -19874,7 +19920,7 @@
         </p:spPr>
         <p:txBody>
           <a:bodyPr>
-            <a:normAutofit/>
+            <a:normAutofit fontScale="92500" lnSpcReduction="10000"/>
           </a:bodyPr>
           <a:lstStyle/>
           <a:p>
@@ -19886,7 +19932,7 @@
           <a:p>
             <a:r>
               <a:rPr lang="en-GB" dirty="0"/>
-              <a:t>Data repositories change, and some no longer exists or have changed</a:t>
+              <a:t>Data source repositories change, and some no longer exists or have changed</a:t>
             </a:r>
           </a:p>
           <a:p>
@@ -19904,6 +19950,13 @@
             </a:r>
           </a:p>
           <a:p>
+            <a:pPr lvl="1"/>
+            <a:r>
+              <a:rPr lang="en-GB" dirty="0"/>
+              <a:t>Refinitiv – bought out, no longer available</a:t>
+            </a:r>
+          </a:p>
+          <a:p>
             <a:r>
               <a:rPr lang="en-GB" dirty="0"/>
               <a:t>ACM a lot of ESG papers from China</a:t>
@@ -19918,7 +19971,7 @@
           <a:p>
             <a:r>
               <a:rPr lang="en-GB" dirty="0"/>
-              <a:t>Additional data sources - references other papers</a:t>
+              <a:t>Additional data sources - references other papers, a lot of general discussion but no absolute definitions around ESG.</a:t>
             </a:r>
           </a:p>
           <a:p>
@@ -19943,10 +19996,6 @@
           </a:p>
           <a:p>
             <a:pPr lvl="1"/>
-            <a:r>
-              <a:rPr lang="en-GB" dirty="0"/>
-              <a:t> </a:t>
-            </a:r>
             <a:r>
               <a:rPr lang="en-GB" dirty="0">
                 <a:hlinkClick r:id="rId4"/>
@@ -21967,12 +22016,6 @@
 </file>
 
 <file path=customXml/item1.xml><?xml version="1.0" encoding="utf-8"?>
-<p:properties xmlns:p="http://schemas.microsoft.com/office/2006/metadata/properties" xmlns:xsi="http://www.w3.org/2001/XMLSchema-instance" xmlns:pc="http://schemas.microsoft.com/office/infopath/2007/PartnerControls">
-  <documentManagement/>
-</p:properties>
-</file>
-
-<file path=customXml/item2.xml><?xml version="1.0" encoding="utf-8"?>
 <ct:contentTypeSchema xmlns:ct="http://schemas.microsoft.com/office/2006/metadata/contentType" xmlns:ma="http://schemas.microsoft.com/office/2006/metadata/properties/metaAttributes" ct:_="" ma:_="" ma:contentTypeName="Document" ma:contentTypeID="0x010100C1649D92A98AC04289356D58C8DD007B" ma:contentTypeVersion="11" ma:contentTypeDescription="Create a new document." ma:contentTypeScope="" ma:versionID="7e7995460e3329ffd5773f731e5d8a8b">
   <xsd:schema xmlns:xsd="http://www.w3.org/2001/XMLSchema" xmlns:xs="http://www.w3.org/2001/XMLSchema" xmlns:p="http://schemas.microsoft.com/office/2006/metadata/properties" xmlns:ns3="728cbe1e-0b6d-4c58-af8f-81e70400b4e3" xmlns:ns4="6e893c43-06e8-4dcc-9162-927e4eb2508b" targetNamespace="http://schemas.microsoft.com/office/2006/metadata/properties" ma:root="true" ma:fieldsID="2efb6d3f5988a35e328101e6e9639f3a" ns3:_="" ns4:_="">
     <xsd:import namespace="728cbe1e-0b6d-4c58-af8f-81e70400b4e3"/>
@@ -22181,6 +22224,12 @@
 </ct:contentTypeSchema>
 </file>
 
+<file path=customXml/item2.xml><?xml version="1.0" encoding="utf-8"?>
+<p:properties xmlns:p="http://schemas.microsoft.com/office/2006/metadata/properties" xmlns:xsi="http://www.w3.org/2001/XMLSchema-instance" xmlns:pc="http://schemas.microsoft.com/office/infopath/2007/PartnerControls">
+  <documentManagement/>
+</p:properties>
+</file>
+
 <file path=customXml/item3.xml><?xml version="1.0" encoding="utf-8"?>
 <?mso-contentType ?>
 <FormTemplates xmlns="http://schemas.microsoft.com/sharepoint/v3/contenttype/forms">
@@ -22191,23 +22240,6 @@
 </file>
 
 <file path=customXml/itemProps1.xml><?xml version="1.0" encoding="utf-8"?>
-<ds:datastoreItem xmlns:ds="http://schemas.openxmlformats.org/officeDocument/2006/customXml" ds:itemID="{CDDC0672-AAE1-4BAF-B2ED-D68B4CD362BA}">
-  <ds:schemaRefs>
-    <ds:schemaRef ds:uri="http://purl.org/dc/terms/"/>
-    <ds:schemaRef ds:uri="http://purl.org/dc/elements/1.1/"/>
-    <ds:schemaRef ds:uri="http://schemas.openxmlformats.org/package/2006/metadata/core-properties"/>
-    <ds:schemaRef ds:uri="http://www.w3.org/XML/1998/namespace"/>
-    <ds:schemaRef ds:uri="http://schemas.microsoft.com/office/2006/documentManagement/types"/>
-    <ds:schemaRef ds:uri="728cbe1e-0b6d-4c58-af8f-81e70400b4e3"/>
-    <ds:schemaRef ds:uri="http://schemas.microsoft.com/office/2006/metadata/properties"/>
-    <ds:schemaRef ds:uri="6e893c43-06e8-4dcc-9162-927e4eb2508b"/>
-    <ds:schemaRef ds:uri="http://schemas.microsoft.com/office/infopath/2007/PartnerControls"/>
-    <ds:schemaRef ds:uri="http://purl.org/dc/dcmitype/"/>
-  </ds:schemaRefs>
-</ds:datastoreItem>
-</file>
-
-<file path=customXml/itemProps2.xml><?xml version="1.0" encoding="utf-8"?>
 <ds:datastoreItem xmlns:ds="http://schemas.openxmlformats.org/officeDocument/2006/customXml" ds:itemID="{62CB332E-3821-4AF0-8DD5-71E41CFE7691}">
   <ds:schemaRefs>
     <ds:schemaRef ds:uri="6e893c43-06e8-4dcc-9162-927e4eb2508b"/>
@@ -22227,6 +22259,23 @@
 </ds:datastoreItem>
 </file>
 
+<file path=customXml/itemProps2.xml><?xml version="1.0" encoding="utf-8"?>
+<ds:datastoreItem xmlns:ds="http://schemas.openxmlformats.org/officeDocument/2006/customXml" ds:itemID="{CDDC0672-AAE1-4BAF-B2ED-D68B4CD362BA}">
+  <ds:schemaRefs>
+    <ds:schemaRef ds:uri="http://purl.org/dc/terms/"/>
+    <ds:schemaRef ds:uri="http://purl.org/dc/elements/1.1/"/>
+    <ds:schemaRef ds:uri="http://schemas.openxmlformats.org/package/2006/metadata/core-properties"/>
+    <ds:schemaRef ds:uri="http://www.w3.org/XML/1998/namespace"/>
+    <ds:schemaRef ds:uri="http://schemas.microsoft.com/office/2006/documentManagement/types"/>
+    <ds:schemaRef ds:uri="728cbe1e-0b6d-4c58-af8f-81e70400b4e3"/>
+    <ds:schemaRef ds:uri="http://schemas.microsoft.com/office/2006/metadata/properties"/>
+    <ds:schemaRef ds:uri="6e893c43-06e8-4dcc-9162-927e4eb2508b"/>
+    <ds:schemaRef ds:uri="http://schemas.microsoft.com/office/infopath/2007/PartnerControls"/>
+    <ds:schemaRef ds:uri="http://purl.org/dc/dcmitype/"/>
+  </ds:schemaRefs>
+</ds:datastoreItem>
+</file>
+
 <file path=customXml/itemProps3.xml><?xml version="1.0" encoding="utf-8"?>
 <ds:datastoreItem xmlns:ds="http://schemas.openxmlformats.org/officeDocument/2006/customXml" ds:itemID="{CA53AD0D-1046-47FD-A817-62AD1F64D7B2}">
   <ds:schemaRefs>
